--- a/slides.pptx
+++ b/slides.pptx
@@ -6645,11 +6645,11 @@
         </p:spPr>
         <p:txBody>
           <a:bodyPr anchorCtr="0" anchor="t" bIns="91425" lIns="91425" spcFirstLastPara="1" rIns="91425" wrap="square" tIns="91425">
-            <a:normAutofit fontScale="92500" lnSpcReduction="10000"/>
+            <a:normAutofit fontScale="85000" lnSpcReduction="20000"/>
           </a:bodyPr>
           <a:lstStyle/>
           <a:p>
-            <a:pPr indent="-334328" lvl="0" marL="457200" rtl="0" algn="just">
+            <a:pPr indent="-325755" lvl="0" marL="457200" rtl="0" algn="just">
               <a:spcBef>
                 <a:spcPts val="0"/>
               </a:spcBef>
@@ -6661,7 +6661,7 @@
             </a:pPr>
             <a:r>
               <a:rPr lang="en"/>
-              <a:t>Il calcolo dei vocabolari di visual words avviene in modo indipendente tra le tre possibili configurazioni di normalizzazione dei descrittori (L1, L2 e assenza di normalizzazione), ma ciò è uno spreco di risorse perché, fissato un metodo (SIFT o ORB) i descrittori iniziali sono gli stessi. Vale un ragionamento analogo per la normalizzazione degli istogrammi. Si noti che implementare tale miglioria è complicato a causa della parallelizzazione e della </a:t>
+              <a:t>Il calcolo dei vocabolari di visual words avviene in modo indipendente tra le tre possibili configurazioni di normalizzazione dei descrittori (L1, L2 e assenza di normalizzazione), ma ciò è uno spreco di risorse perché, fissato un metodo (SIFT o ORB), i descrittori iniziali sono gli stessi. Vale un ragionamento analogo per la normalizzazione degli istogrammi. Si noti che implementare tale miglioria è complicato a causa della parallelizzazione e della </a:t>
             </a:r>
             <a:r>
               <a:rPr lang="en"/>
@@ -6674,7 +6674,7 @@
             <a:endParaRPr/>
           </a:p>
           <a:p>
-            <a:pPr indent="-334328" lvl="0" marL="457200" rtl="0" algn="just">
+            <a:pPr indent="-325755" lvl="0" marL="457200" rtl="0" algn="just">
               <a:spcBef>
                 <a:spcPts val="0"/>
               </a:spcBef>
@@ -6703,7 +6703,24 @@
             <a:endParaRPr/>
           </a:p>
           <a:p>
-            <a:pPr indent="-334328" lvl="0" marL="457200" rtl="0" algn="just">
+            <a:pPr indent="-325755" lvl="0" marL="457200" rtl="0" algn="just">
+              <a:spcBef>
+                <a:spcPts val="0"/>
+              </a:spcBef>
+              <a:spcAft>
+                <a:spcPts val="0"/>
+              </a:spcAft>
+              <a:buSzPct val="100000"/>
+              <a:buChar char="●"/>
+            </a:pPr>
+            <a:r>
+              <a:rPr lang="en"/>
+              <a:t>I descrittori SIFT e ORB possono essere estratti solo da un singolo canale dell’immagine, pertanto l’informazione di colore non viene considerata dal classificatore. È quindi possibile usare una concatenazioni di istogrammi calcolati sui singoli canali di uno spazio colore.</a:t>
+            </a:r>
+            <a:endParaRPr/>
+          </a:p>
+          <a:p>
+            <a:pPr indent="-325755" lvl="0" marL="457200" rtl="0" algn="just">
               <a:spcBef>
                 <a:spcPts val="0"/>
               </a:spcBef>
@@ -7005,15 +7022,7 @@
             </a:r>
             <a:r>
               <a:rPr lang="en"/>
-              <a:t>per l’implementazione iniziale del parallelismo a livello di processo e della funzione </a:t>
-            </a:r>
-            <a:r>
-              <a:rPr i="1" lang="en"/>
-              <a:t>save_classifier()</a:t>
-            </a:r>
-            <a:r>
-              <a:rPr lang="en"/>
-              <a:t>.</a:t>
+              <a:t>per l’implementazione iniziale del parallelismo a livello di processo.</a:t>
             </a:r>
             <a:endParaRPr/>
           </a:p>
@@ -8178,7 +8187,7 @@
             <a:tbl>
               <a:tblPr>
                 <a:noFill/>
-                <a:tableStyleId>{C7A20F54-FE17-4F07-9B07-21A5F8F3D786}</a:tableStyleId>
+                <a:tableStyleId>{3DDE0612-38BE-4772-8923-1132620DDBAB}</a:tableStyleId>
               </a:tblPr>
               <a:tblGrid>
                 <a:gridCol w="946725"/>
@@ -8588,7 +8597,7 @@
                       </a:pPr>
                       <a:r>
                         <a:rPr lang="en" sz="1100"/>
-                        <a:t>0.72</a:t>
+                        <a:t>0.7223</a:t>
                       </a:r>
                       <a:endParaRPr sz="1100"/>
                     </a:p>
@@ -8615,7 +8624,7 @@
                       </a:pPr>
                       <a:r>
                         <a:rPr lang="en" sz="1100"/>
-                        <a:t>0.73</a:t>
+                        <a:t>0.7270</a:t>
                       </a:r>
                       <a:endParaRPr sz="1100"/>
                     </a:p>
@@ -8642,7 +8651,7 @@
                       </a:pPr>
                       <a:r>
                         <a:rPr lang="en" sz="1100"/>
-                        <a:t>0.72</a:t>
+                        <a:t>0.7224</a:t>
                       </a:r>
                       <a:endParaRPr sz="1100"/>
                     </a:p>
@@ -8669,7 +8678,7 @@
                       </a:pPr>
                       <a:r>
                         <a:rPr lang="en" sz="1100"/>
-                        <a:t>0.72</a:t>
+                        <a:t>0.7209</a:t>
                       </a:r>
                       <a:endParaRPr sz="1100"/>
                     </a:p>
@@ -8813,7 +8822,7 @@
                       </a:pPr>
                       <a:r>
                         <a:rPr lang="en" sz="1100"/>
-                        <a:t>0.71</a:t>
+                        <a:t>0.7142</a:t>
                       </a:r>
                       <a:endParaRPr sz="1100"/>
                     </a:p>
@@ -8836,7 +8845,7 @@
                       </a:pPr>
                       <a:r>
                         <a:rPr lang="en" sz="1100"/>
-                        <a:t>0.72</a:t>
+                        <a:t>0.7170</a:t>
                       </a:r>
                       <a:endParaRPr sz="1100"/>
                     </a:p>
@@ -8859,7 +8868,7 @@
                       </a:pPr>
                       <a:r>
                         <a:rPr lang="en" sz="1100"/>
-                        <a:t>0.71</a:t>
+                        <a:t>0.7143</a:t>
                       </a:r>
                       <a:endParaRPr sz="1100"/>
                     </a:p>
@@ -8882,7 +8891,7 @@
                       </a:pPr>
                       <a:r>
                         <a:rPr lang="en" sz="1100"/>
-                        <a:t>0.71</a:t>
+                        <a:t>0.7113</a:t>
                       </a:r>
                       <a:endParaRPr sz="1100"/>
                     </a:p>
@@ -9022,7 +9031,7 @@
                       </a:pPr>
                       <a:r>
                         <a:rPr lang="en" sz="1100"/>
-                        <a:t>0.69</a:t>
+                        <a:t>0.6946</a:t>
                       </a:r>
                       <a:endParaRPr sz="1100"/>
                     </a:p>
@@ -9045,7 +9054,7 @@
                       </a:pPr>
                       <a:r>
                         <a:rPr lang="en" sz="1100"/>
-                        <a:t>0.70</a:t>
+                        <a:t>0.6967</a:t>
                       </a:r>
                       <a:endParaRPr sz="1100"/>
                     </a:p>
@@ -9068,7 +9077,7 @@
                       </a:pPr>
                       <a:r>
                         <a:rPr lang="en" sz="1100"/>
-                        <a:t>0.69</a:t>
+                        <a:t>0.6948</a:t>
                       </a:r>
                       <a:endParaRPr sz="1100"/>
                     </a:p>
@@ -9091,7 +9100,7 @@
                       </a:pPr>
                       <a:r>
                         <a:rPr lang="en" sz="1100"/>
-                        <a:t>0.69</a:t>
+                        <a:t>0.6866</a:t>
                       </a:r>
                       <a:endParaRPr sz="1100"/>
                     </a:p>
@@ -9231,7 +9240,7 @@
                       </a:pPr>
                       <a:r>
                         <a:rPr lang="en" sz="1100"/>
-                        <a:t>0.65</a:t>
+                        <a:t>0.6526</a:t>
                       </a:r>
                       <a:endParaRPr sz="1100"/>
                     </a:p>
@@ -9254,7 +9263,7 @@
                       </a:pPr>
                       <a:r>
                         <a:rPr lang="en" sz="1100"/>
-                        <a:t>0.65</a:t>
+                        <a:t>0.6542</a:t>
                       </a:r>
                       <a:endParaRPr sz="1100"/>
                     </a:p>
@@ -9277,7 +9286,7 @@
                       </a:pPr>
                       <a:r>
                         <a:rPr lang="en" sz="1100"/>
-                        <a:t>0.65</a:t>
+                        <a:t>0.6530</a:t>
                       </a:r>
                       <a:endParaRPr sz="1100"/>
                     </a:p>
@@ -9300,7 +9309,7 @@
                       </a:pPr>
                       <a:r>
                         <a:rPr lang="en" sz="1100"/>
-                        <a:t>0.65</a:t>
+                        <a:t>0.6476</a:t>
                       </a:r>
                       <a:endParaRPr sz="1100"/>
                     </a:p>
@@ -9440,7 +9449,7 @@
                       </a:pPr>
                       <a:r>
                         <a:rPr lang="en" sz="1200"/>
-                        <a:t>0.62</a:t>
+                        <a:t>0.6264</a:t>
                       </a:r>
                       <a:endParaRPr sz="1200"/>
                     </a:p>
@@ -9463,7 +9472,7 @@
                       </a:pPr>
                       <a:r>
                         <a:rPr lang="en" sz="1200"/>
-                        <a:t>0.64</a:t>
+                        <a:t>0.6373</a:t>
                       </a:r>
                       <a:endParaRPr sz="1200"/>
                     </a:p>
@@ -9486,7 +9495,7 @@
                       </a:pPr>
                       <a:r>
                         <a:rPr lang="en" sz="1200"/>
-                        <a:t>0.63</a:t>
+                        <a:t>0.6267</a:t>
                       </a:r>
                       <a:endParaRPr sz="1200"/>
                     </a:p>
@@ -9509,7 +9518,7 @@
                       </a:pPr>
                       <a:r>
                         <a:rPr lang="en" sz="1200"/>
-                        <a:t>0.62</a:t>
+                        <a:t>0.6203</a:t>
                       </a:r>
                       <a:endParaRPr sz="1200"/>
                     </a:p>

--- a/slides.pptx
+++ b/slides.pptx
@@ -7502,11 +7502,11 @@
         </p:spPr>
         <p:txBody>
           <a:bodyPr anchorCtr="0" anchor="t" bIns="91425" lIns="91425" spcFirstLastPara="1" rIns="91425" wrap="square" tIns="91425">
-            <a:normAutofit fontScale="92500" lnSpcReduction="10000"/>
+            <a:normAutofit fontScale="85000" lnSpcReduction="10000"/>
           </a:bodyPr>
           <a:lstStyle/>
           <a:p>
-            <a:pPr indent="-334328" lvl="0" marL="457200" rtl="0" algn="just">
+            <a:pPr indent="-325755" lvl="0" marL="457200" rtl="0" algn="just">
               <a:spcBef>
                 <a:spcPts val="0"/>
               </a:spcBef>
@@ -7527,7 +7527,7 @@
             <a:endParaRPr/>
           </a:p>
           <a:p>
-            <a:pPr indent="-334328" lvl="0" marL="457200" rtl="0" algn="just">
+            <a:pPr indent="-325755" lvl="0" marL="457200" rtl="0" algn="just">
               <a:spcBef>
                 <a:spcPts val="0"/>
               </a:spcBef>
@@ -7544,7 +7544,7 @@
             <a:endParaRPr/>
           </a:p>
           <a:p>
-            <a:pPr indent="-334328" lvl="0" marL="457200" rtl="0" algn="just">
+            <a:pPr indent="-325755" lvl="0" marL="457200" rtl="0" algn="just">
               <a:spcBef>
                 <a:spcPts val="0"/>
               </a:spcBef>
@@ -7561,7 +7561,7 @@
             <a:endParaRPr/>
           </a:p>
           <a:p>
-            <a:pPr indent="-334328" lvl="0" marL="457200" rtl="0" algn="just">
+            <a:pPr indent="-325755" lvl="0" marL="457200" rtl="0" algn="just">
               <a:spcBef>
                 <a:spcPts val="0"/>
               </a:spcBef>
@@ -7573,12 +7573,12 @@
             </a:pPr>
             <a:r>
               <a:rPr lang="en"/>
-              <a:t>In particolare, viene utilizzata la variante batch di K-means, la quale permette di individuare i centroidi senza avere a disposizione tutti i descrittori contemporaneamente. Si è scelto di utilizzare una singola iterazione dei batch a causa dell’alta disponibilità di descrittori (&gt; 10,000,000).</a:t>
+              <a:t>In particolare, viene utilizzata la variante batch di K-means, la quale permette di individuare i centroidi senza avere a disposizione tutti i descrittori contemporaneamente. Si è scelto di utilizzare una singola iterazione dei batch a causa dell’alta disponibilità di descrittori (&gt; 10,000,000) e si è verificato che, anche se il numero di iterazioni viene posto a tre, l'accuratezza del classificatore migliore non subisce miglioramenti significativi.</a:t>
             </a:r>
             <a:endParaRPr/>
           </a:p>
           <a:p>
-            <a:pPr indent="-334328" lvl="0" marL="457200" rtl="0" algn="just">
+            <a:pPr indent="-325755" lvl="0" marL="457200" rtl="0" algn="just">
               <a:spcBef>
                 <a:spcPts val="0"/>
               </a:spcBef>
@@ -8187,7 +8187,7 @@
             <a:tbl>
               <a:tblPr>
                 <a:noFill/>
-                <a:tableStyleId>{3DDE0612-38BE-4772-8923-1132620DDBAB}</a:tableStyleId>
+                <a:tableStyleId>{31B95FE4-F402-427B-959E-E751FB834CB4}</a:tableStyleId>
               </a:tblPr>
               <a:tblGrid>
                 <a:gridCol w="946725"/>
@@ -9701,13 +9701,13 @@
           <a:blip r:embed="rId3">
             <a:alphaModFix/>
           </a:blip>
-          <a:srcRect b="4248" l="2737" r="7834" t="10457"/>
+          <a:srcRect b="4305" l="5774" r="14136" t="10776"/>
           <a:stretch/>
         </p:blipFill>
         <p:spPr>
           <a:xfrm>
-            <a:off x="5555475" y="1288899"/>
-            <a:ext cx="3276825" cy="3143574"/>
+            <a:off x="5432700" y="1434925"/>
+            <a:ext cx="3399600" cy="2851500"/>
           </a:xfrm>
           <a:prstGeom prst="rect">
             <a:avLst/>
@@ -9901,13 +9901,13 @@
           <a:blip r:embed="rId3">
             <a:alphaModFix/>
           </a:blip>
-          <a:srcRect b="4248" l="2737" r="7834" t="10457"/>
+          <a:srcRect b="4305" l="5774" r="14136" t="10776"/>
           <a:stretch/>
         </p:blipFill>
         <p:spPr>
           <a:xfrm>
-            <a:off x="5555475" y="1288899"/>
-            <a:ext cx="3276825" cy="3143574"/>
+            <a:off x="5432700" y="1434925"/>
+            <a:ext cx="3399600" cy="2851500"/>
           </a:xfrm>
           <a:prstGeom prst="rect">
             <a:avLst/>
@@ -9927,6 +9927,285 @@
 </file>
 
 <file path=ppt/theme/theme1.xml><?xml version="1.0" encoding="utf-8"?>
+<a:theme xmlns:a="http://schemas.openxmlformats.org/drawingml/2006/main" xmlns:r="http://schemas.openxmlformats.org/officeDocument/2006/relationships" name="Simple Light">
+  <a:themeElements>
+    <a:clrScheme name="Simple Light">
+      <a:dk1>
+        <a:srgbClr val="000000"/>
+      </a:dk1>
+      <a:lt1>
+        <a:srgbClr val="FFFFFF"/>
+      </a:lt1>
+      <a:dk2>
+        <a:srgbClr val="595959"/>
+      </a:dk2>
+      <a:lt2>
+        <a:srgbClr val="EEEEEE"/>
+      </a:lt2>
+      <a:accent1>
+        <a:srgbClr val="4285F4"/>
+      </a:accent1>
+      <a:accent2>
+        <a:srgbClr val="212121"/>
+      </a:accent2>
+      <a:accent3>
+        <a:srgbClr val="78909C"/>
+      </a:accent3>
+      <a:accent4>
+        <a:srgbClr val="FFAB40"/>
+      </a:accent4>
+      <a:accent5>
+        <a:srgbClr val="0097A7"/>
+      </a:accent5>
+      <a:accent6>
+        <a:srgbClr val="EEFF41"/>
+      </a:accent6>
+      <a:hlink>
+        <a:srgbClr val="0097A7"/>
+      </a:hlink>
+      <a:folHlink>
+        <a:srgbClr val="0097A7"/>
+      </a:folHlink>
+    </a:clrScheme>
+    <a:fontScheme name="Office">
+      <a:majorFont>
+        <a:latin typeface="Arial"/>
+        <a:ea typeface=""/>
+        <a:cs typeface=""/>
+        <a:font script="Jpan" typeface="ＭＳ Ｐゴシック"/>
+        <a:font script="Hang" typeface="맑은 고딕"/>
+        <a:font script="Hans" typeface="宋体"/>
+        <a:font script="Hant" typeface="新細明體"/>
+        <a:font script="Arab" typeface="Times New Roman"/>
+        <a:font script="Hebr" typeface="Times New Roman"/>
+        <a:font script="Thai" typeface="Angsana New"/>
+        <a:font script="Ethi" typeface="Nyala"/>
+        <a:font script="Beng" typeface="Vrinda"/>
+        <a:font script="Gujr" typeface="Shruti"/>
+        <a:font script="Khmr" typeface="MoolBoran"/>
+        <a:font script="Knda" typeface="Tunga"/>
+        <a:font script="Guru" typeface="Raavi"/>
+        <a:font script="Cans" typeface="Euphemia"/>
+        <a:font script="Cher" typeface="Plantagenet Cherokee"/>
+        <a:font script="Yiii" typeface="Microsoft Yi Baiti"/>
+        <a:font script="Tibt" typeface="Microsoft Himalaya"/>
+        <a:font script="Thaa" typeface="MV Boli"/>
+        <a:font script="Deva" typeface="Mangal"/>
+        <a:font script="Telu" typeface="Gautami"/>
+        <a:font script="Taml" typeface="Latha"/>
+        <a:font script="Syrc" typeface="Estrangelo Edessa"/>
+        <a:font script="Orya" typeface="Kalinga"/>
+        <a:font script="Mlym" typeface="Kartika"/>
+        <a:font script="Laoo" typeface="DokChampa"/>
+        <a:font script="Sinh" typeface="Iskoola Pota"/>
+        <a:font script="Mong" typeface="Mongolian Baiti"/>
+        <a:font script="Viet" typeface="Times New Roman"/>
+        <a:font script="Uigh" typeface="Microsoft Uighur"/>
+        <a:font script="Geor" typeface="Sylfaen"/>
+      </a:majorFont>
+      <a:minorFont>
+        <a:latin typeface="Arial"/>
+        <a:ea typeface=""/>
+        <a:cs typeface=""/>
+        <a:font script="Jpan" typeface="ＭＳ Ｐゴシック"/>
+        <a:font script="Hang" typeface="맑은 고딕"/>
+        <a:font script="Hans" typeface="宋体"/>
+        <a:font script="Hant" typeface="新細明體"/>
+        <a:font script="Arab" typeface="Arial"/>
+        <a:font script="Hebr" typeface="Arial"/>
+        <a:font script="Thai" typeface="Cordia New"/>
+        <a:font script="Ethi" typeface="Nyala"/>
+        <a:font script="Beng" typeface="Vrinda"/>
+        <a:font script="Gujr" typeface="Shruti"/>
+        <a:font script="Khmr" typeface="DaunPenh"/>
+        <a:font script="Knda" typeface="Tunga"/>
+        <a:font script="Guru" typeface="Raavi"/>
+        <a:font script="Cans" typeface="Euphemia"/>
+        <a:font script="Cher" typeface="Plantagenet Cherokee"/>
+        <a:font script="Yiii" typeface="Microsoft Yi Baiti"/>
+        <a:font script="Tibt" typeface="Microsoft Himalaya"/>
+        <a:font script="Thaa" typeface="MV Boli"/>
+        <a:font script="Deva" typeface="Mangal"/>
+        <a:font script="Telu" typeface="Gautami"/>
+        <a:font script="Taml" typeface="Latha"/>
+        <a:font script="Syrc" typeface="Estrangelo Edessa"/>
+        <a:font script="Orya" typeface="Kalinga"/>
+        <a:font script="Mlym" typeface="Kartika"/>
+        <a:font script="Laoo" typeface="DokChampa"/>
+        <a:font script="Sinh" typeface="Iskoola Pota"/>
+        <a:font script="Mong" typeface="Mongolian Baiti"/>
+        <a:font script="Viet" typeface="Arial"/>
+        <a:font script="Uigh" typeface="Microsoft Uighur"/>
+        <a:font script="Geor" typeface="Sylfaen"/>
+      </a:minorFont>
+    </a:fontScheme>
+    <a:fmtScheme name="Office">
+      <a:fillStyleLst>
+        <a:solidFill>
+          <a:schemeClr val="phClr"/>
+        </a:solidFill>
+        <a:gradFill rotWithShape="1">
+          <a:gsLst>
+            <a:gs pos="0">
+              <a:schemeClr val="phClr">
+                <a:tint val="50000"/>
+                <a:satMod val="300000"/>
+              </a:schemeClr>
+            </a:gs>
+            <a:gs pos="35000">
+              <a:schemeClr val="phClr">
+                <a:tint val="37000"/>
+                <a:satMod val="300000"/>
+              </a:schemeClr>
+            </a:gs>
+            <a:gs pos="100000">
+              <a:schemeClr val="phClr">
+                <a:tint val="15000"/>
+                <a:satMod val="350000"/>
+              </a:schemeClr>
+            </a:gs>
+          </a:gsLst>
+          <a:lin ang="16200000" scaled="1"/>
+        </a:gradFill>
+        <a:gradFill rotWithShape="1">
+          <a:gsLst>
+            <a:gs pos="0">
+              <a:schemeClr val="phClr">
+                <a:tint val="100000"/>
+                <a:shade val="100000"/>
+                <a:satMod val="130000"/>
+              </a:schemeClr>
+            </a:gs>
+            <a:gs pos="100000">
+              <a:schemeClr val="phClr">
+                <a:tint val="50000"/>
+                <a:shade val="100000"/>
+                <a:satMod val="350000"/>
+              </a:schemeClr>
+            </a:gs>
+          </a:gsLst>
+          <a:lin ang="16200000" scaled="0"/>
+        </a:gradFill>
+      </a:fillStyleLst>
+      <a:lnStyleLst>
+        <a:ln w="9525" cap="flat" cmpd="sng" algn="ctr">
+          <a:solidFill>
+            <a:schemeClr val="phClr">
+              <a:shade val="95000"/>
+              <a:satMod val="105000"/>
+            </a:schemeClr>
+          </a:solidFill>
+          <a:prstDash val="solid"/>
+        </a:ln>
+        <a:ln w="25400" cap="flat" cmpd="sng" algn="ctr">
+          <a:solidFill>
+            <a:schemeClr val="phClr"/>
+          </a:solidFill>
+          <a:prstDash val="solid"/>
+        </a:ln>
+        <a:ln w="38100" cap="flat" cmpd="sng" algn="ctr">
+          <a:solidFill>
+            <a:schemeClr val="phClr"/>
+          </a:solidFill>
+          <a:prstDash val="solid"/>
+        </a:ln>
+      </a:lnStyleLst>
+      <a:effectStyleLst>
+        <a:effectStyle>
+          <a:effectLst>
+            <a:outerShdw blurRad="40000" dist="20000" dir="5400000" rotWithShape="0">
+              <a:srgbClr val="000000">
+                <a:alpha val="38000"/>
+              </a:srgbClr>
+            </a:outerShdw>
+          </a:effectLst>
+        </a:effectStyle>
+        <a:effectStyle>
+          <a:effectLst>
+            <a:outerShdw blurRad="40000" dist="23000" dir="5400000" rotWithShape="0">
+              <a:srgbClr val="000000">
+                <a:alpha val="35000"/>
+              </a:srgbClr>
+            </a:outerShdw>
+          </a:effectLst>
+        </a:effectStyle>
+        <a:effectStyle>
+          <a:effectLst>
+            <a:outerShdw blurRad="40000" dist="23000" dir="5400000" rotWithShape="0">
+              <a:srgbClr val="000000">
+                <a:alpha val="35000"/>
+              </a:srgbClr>
+            </a:outerShdw>
+          </a:effectLst>
+          <a:scene3d>
+            <a:camera prst="orthographicFront">
+              <a:rot lat="0" lon="0" rev="0"/>
+            </a:camera>
+            <a:lightRig rig="threePt" dir="t">
+              <a:rot lat="0" lon="0" rev="1200000"/>
+            </a:lightRig>
+          </a:scene3d>
+          <a:sp3d>
+            <a:bevelT w="63500" h="25400"/>
+          </a:sp3d>
+        </a:effectStyle>
+      </a:effectStyleLst>
+      <a:bgFillStyleLst>
+        <a:solidFill>
+          <a:schemeClr val="phClr"/>
+        </a:solidFill>
+        <a:gradFill rotWithShape="1">
+          <a:gsLst>
+            <a:gs pos="0">
+              <a:schemeClr val="phClr">
+                <a:tint val="40000"/>
+                <a:satMod val="350000"/>
+              </a:schemeClr>
+            </a:gs>
+            <a:gs pos="40000">
+              <a:schemeClr val="phClr">
+                <a:tint val="45000"/>
+                <a:shade val="99000"/>
+                <a:satMod val="350000"/>
+              </a:schemeClr>
+            </a:gs>
+            <a:gs pos="100000">
+              <a:schemeClr val="phClr">
+                <a:shade val="20000"/>
+                <a:satMod val="255000"/>
+              </a:schemeClr>
+            </a:gs>
+          </a:gsLst>
+          <a:path path="circle">
+            <a:fillToRect l="50000" t="-80000" r="50000" b="180000"/>
+          </a:path>
+        </a:gradFill>
+        <a:gradFill rotWithShape="1">
+          <a:gsLst>
+            <a:gs pos="0">
+              <a:schemeClr val="phClr">
+                <a:tint val="80000"/>
+                <a:satMod val="300000"/>
+              </a:schemeClr>
+            </a:gs>
+            <a:gs pos="100000">
+              <a:schemeClr val="phClr">
+                <a:shade val="30000"/>
+                <a:satMod val="200000"/>
+              </a:schemeClr>
+            </a:gs>
+          </a:gsLst>
+          <a:path path="circle">
+            <a:fillToRect l="50000" t="50000" r="50000" b="50000"/>
+          </a:path>
+        </a:gradFill>
+      </a:bgFillStyleLst>
+    </a:fmtScheme>
+  </a:themeElements>
+</a:theme>
+</file>
+
+<file path=ppt/theme/theme2.xml><?xml version="1.0" encoding="utf-8"?>
 <a:theme xmlns:a="http://schemas.openxmlformats.org/drawingml/2006/main" xmlns:r="http://schemas.openxmlformats.org/officeDocument/2006/relationships">
   <a:themeElements>
     <a:clrScheme name="Default">
@@ -10203,283 +10482,4 @@
     </a:fmtScheme>
   </a:themeElements>
 </a:theme>
-</file>
-
-<file path=ppt/theme/theme2.xml><?xml version="1.0" encoding="utf-8"?>
-<a:theme xmlns:a="http://schemas.openxmlformats.org/drawingml/2006/main" xmlns:r="http://schemas.openxmlformats.org/officeDocument/2006/relationships" name="Simple Light">
-  <a:themeElements>
-    <a:clrScheme name="Simple Light">
-      <a:dk1>
-        <a:srgbClr val="000000"/>
-      </a:dk1>
-      <a:lt1>
-        <a:srgbClr val="FFFFFF"/>
-      </a:lt1>
-      <a:dk2>
-        <a:srgbClr val="595959"/>
-      </a:dk2>
-      <a:lt2>
-        <a:srgbClr val="EEEEEE"/>
-      </a:lt2>
-      <a:accent1>
-        <a:srgbClr val="4285F4"/>
-      </a:accent1>
-      <a:accent2>
-        <a:srgbClr val="212121"/>
-      </a:accent2>
-      <a:accent3>
-        <a:srgbClr val="78909C"/>
-      </a:accent3>
-      <a:accent4>
-        <a:srgbClr val="FFAB40"/>
-      </a:accent4>
-      <a:accent5>
-        <a:srgbClr val="0097A7"/>
-      </a:accent5>
-      <a:accent6>
-        <a:srgbClr val="EEFF41"/>
-      </a:accent6>
-      <a:hlink>
-        <a:srgbClr val="0097A7"/>
-      </a:hlink>
-      <a:folHlink>
-        <a:srgbClr val="0097A7"/>
-      </a:folHlink>
-    </a:clrScheme>
-    <a:fontScheme name="Office">
-      <a:majorFont>
-        <a:latin typeface="Arial"/>
-        <a:ea typeface=""/>
-        <a:cs typeface=""/>
-        <a:font script="Jpan" typeface="ＭＳ Ｐゴシック"/>
-        <a:font script="Hang" typeface="맑은 고딕"/>
-        <a:font script="Hans" typeface="宋体"/>
-        <a:font script="Hant" typeface="新細明體"/>
-        <a:font script="Arab" typeface="Times New Roman"/>
-        <a:font script="Hebr" typeface="Times New Roman"/>
-        <a:font script="Thai" typeface="Angsana New"/>
-        <a:font script="Ethi" typeface="Nyala"/>
-        <a:font script="Beng" typeface="Vrinda"/>
-        <a:font script="Gujr" typeface="Shruti"/>
-        <a:font script="Khmr" typeface="MoolBoran"/>
-        <a:font script="Knda" typeface="Tunga"/>
-        <a:font script="Guru" typeface="Raavi"/>
-        <a:font script="Cans" typeface="Euphemia"/>
-        <a:font script="Cher" typeface="Plantagenet Cherokee"/>
-        <a:font script="Yiii" typeface="Microsoft Yi Baiti"/>
-        <a:font script="Tibt" typeface="Microsoft Himalaya"/>
-        <a:font script="Thaa" typeface="MV Boli"/>
-        <a:font script="Deva" typeface="Mangal"/>
-        <a:font script="Telu" typeface="Gautami"/>
-        <a:font script="Taml" typeface="Latha"/>
-        <a:font script="Syrc" typeface="Estrangelo Edessa"/>
-        <a:font script="Orya" typeface="Kalinga"/>
-        <a:font script="Mlym" typeface="Kartika"/>
-        <a:font script="Laoo" typeface="DokChampa"/>
-        <a:font script="Sinh" typeface="Iskoola Pota"/>
-        <a:font script="Mong" typeface="Mongolian Baiti"/>
-        <a:font script="Viet" typeface="Times New Roman"/>
-        <a:font script="Uigh" typeface="Microsoft Uighur"/>
-        <a:font script="Geor" typeface="Sylfaen"/>
-      </a:majorFont>
-      <a:minorFont>
-        <a:latin typeface="Arial"/>
-        <a:ea typeface=""/>
-        <a:cs typeface=""/>
-        <a:font script="Jpan" typeface="ＭＳ Ｐゴシック"/>
-        <a:font script="Hang" typeface="맑은 고딕"/>
-        <a:font script="Hans" typeface="宋体"/>
-        <a:font script="Hant" typeface="新細明體"/>
-        <a:font script="Arab" typeface="Arial"/>
-        <a:font script="Hebr" typeface="Arial"/>
-        <a:font script="Thai" typeface="Cordia New"/>
-        <a:font script="Ethi" typeface="Nyala"/>
-        <a:font script="Beng" typeface="Vrinda"/>
-        <a:font script="Gujr" typeface="Shruti"/>
-        <a:font script="Khmr" typeface="DaunPenh"/>
-        <a:font script="Knda" typeface="Tunga"/>
-        <a:font script="Guru" typeface="Raavi"/>
-        <a:font script="Cans" typeface="Euphemia"/>
-        <a:font script="Cher" typeface="Plantagenet Cherokee"/>
-        <a:font script="Yiii" typeface="Microsoft Yi Baiti"/>
-        <a:font script="Tibt" typeface="Microsoft Himalaya"/>
-        <a:font script="Thaa" typeface="MV Boli"/>
-        <a:font script="Deva" typeface="Mangal"/>
-        <a:font script="Telu" typeface="Gautami"/>
-        <a:font script="Taml" typeface="Latha"/>
-        <a:font script="Syrc" typeface="Estrangelo Edessa"/>
-        <a:font script="Orya" typeface="Kalinga"/>
-        <a:font script="Mlym" typeface="Kartika"/>
-        <a:font script="Laoo" typeface="DokChampa"/>
-        <a:font script="Sinh" typeface="Iskoola Pota"/>
-        <a:font script="Mong" typeface="Mongolian Baiti"/>
-        <a:font script="Viet" typeface="Arial"/>
-        <a:font script="Uigh" typeface="Microsoft Uighur"/>
-        <a:font script="Geor" typeface="Sylfaen"/>
-      </a:minorFont>
-    </a:fontScheme>
-    <a:fmtScheme name="Office">
-      <a:fillStyleLst>
-        <a:solidFill>
-          <a:schemeClr val="phClr"/>
-        </a:solidFill>
-        <a:gradFill rotWithShape="1">
-          <a:gsLst>
-            <a:gs pos="0">
-              <a:schemeClr val="phClr">
-                <a:tint val="50000"/>
-                <a:satMod val="300000"/>
-              </a:schemeClr>
-            </a:gs>
-            <a:gs pos="35000">
-              <a:schemeClr val="phClr">
-                <a:tint val="37000"/>
-                <a:satMod val="300000"/>
-              </a:schemeClr>
-            </a:gs>
-            <a:gs pos="100000">
-              <a:schemeClr val="phClr">
-                <a:tint val="15000"/>
-                <a:satMod val="350000"/>
-              </a:schemeClr>
-            </a:gs>
-          </a:gsLst>
-          <a:lin ang="16200000" scaled="1"/>
-        </a:gradFill>
-        <a:gradFill rotWithShape="1">
-          <a:gsLst>
-            <a:gs pos="0">
-              <a:schemeClr val="phClr">
-                <a:tint val="100000"/>
-                <a:shade val="100000"/>
-                <a:satMod val="130000"/>
-              </a:schemeClr>
-            </a:gs>
-            <a:gs pos="100000">
-              <a:schemeClr val="phClr">
-                <a:tint val="50000"/>
-                <a:shade val="100000"/>
-                <a:satMod val="350000"/>
-              </a:schemeClr>
-            </a:gs>
-          </a:gsLst>
-          <a:lin ang="16200000" scaled="0"/>
-        </a:gradFill>
-      </a:fillStyleLst>
-      <a:lnStyleLst>
-        <a:ln w="9525" cap="flat" cmpd="sng" algn="ctr">
-          <a:solidFill>
-            <a:schemeClr val="phClr">
-              <a:shade val="95000"/>
-              <a:satMod val="105000"/>
-            </a:schemeClr>
-          </a:solidFill>
-          <a:prstDash val="solid"/>
-        </a:ln>
-        <a:ln w="25400" cap="flat" cmpd="sng" algn="ctr">
-          <a:solidFill>
-            <a:schemeClr val="phClr"/>
-          </a:solidFill>
-          <a:prstDash val="solid"/>
-        </a:ln>
-        <a:ln w="38100" cap="flat" cmpd="sng" algn="ctr">
-          <a:solidFill>
-            <a:schemeClr val="phClr"/>
-          </a:solidFill>
-          <a:prstDash val="solid"/>
-        </a:ln>
-      </a:lnStyleLst>
-      <a:effectStyleLst>
-        <a:effectStyle>
-          <a:effectLst>
-            <a:outerShdw blurRad="40000" dist="20000" dir="5400000" rotWithShape="0">
-              <a:srgbClr val="000000">
-                <a:alpha val="38000"/>
-              </a:srgbClr>
-            </a:outerShdw>
-          </a:effectLst>
-        </a:effectStyle>
-        <a:effectStyle>
-          <a:effectLst>
-            <a:outerShdw blurRad="40000" dist="23000" dir="5400000" rotWithShape="0">
-              <a:srgbClr val="000000">
-                <a:alpha val="35000"/>
-              </a:srgbClr>
-            </a:outerShdw>
-          </a:effectLst>
-        </a:effectStyle>
-        <a:effectStyle>
-          <a:effectLst>
-            <a:outerShdw blurRad="40000" dist="23000" dir="5400000" rotWithShape="0">
-              <a:srgbClr val="000000">
-                <a:alpha val="35000"/>
-              </a:srgbClr>
-            </a:outerShdw>
-          </a:effectLst>
-          <a:scene3d>
-            <a:camera prst="orthographicFront">
-              <a:rot lat="0" lon="0" rev="0"/>
-            </a:camera>
-            <a:lightRig rig="threePt" dir="t">
-              <a:rot lat="0" lon="0" rev="1200000"/>
-            </a:lightRig>
-          </a:scene3d>
-          <a:sp3d>
-            <a:bevelT w="63500" h="25400"/>
-          </a:sp3d>
-        </a:effectStyle>
-      </a:effectStyleLst>
-      <a:bgFillStyleLst>
-        <a:solidFill>
-          <a:schemeClr val="phClr"/>
-        </a:solidFill>
-        <a:gradFill rotWithShape="1">
-          <a:gsLst>
-            <a:gs pos="0">
-              <a:schemeClr val="phClr">
-                <a:tint val="40000"/>
-                <a:satMod val="350000"/>
-              </a:schemeClr>
-            </a:gs>
-            <a:gs pos="40000">
-              <a:schemeClr val="phClr">
-                <a:tint val="45000"/>
-                <a:shade val="99000"/>
-                <a:satMod val="350000"/>
-              </a:schemeClr>
-            </a:gs>
-            <a:gs pos="100000">
-              <a:schemeClr val="phClr">
-                <a:shade val="20000"/>
-                <a:satMod val="255000"/>
-              </a:schemeClr>
-            </a:gs>
-          </a:gsLst>
-          <a:path path="circle">
-            <a:fillToRect l="50000" t="-80000" r="50000" b="180000"/>
-          </a:path>
-        </a:gradFill>
-        <a:gradFill rotWithShape="1">
-          <a:gsLst>
-            <a:gs pos="0">
-              <a:schemeClr val="phClr">
-                <a:tint val="80000"/>
-                <a:satMod val="300000"/>
-              </a:schemeClr>
-            </a:gs>
-            <a:gs pos="100000">
-              <a:schemeClr val="phClr">
-                <a:shade val="30000"/>
-                <a:satMod val="200000"/>
-              </a:schemeClr>
-            </a:gs>
-          </a:gsLst>
-          <a:path path="circle">
-            <a:fillToRect l="50000" t="50000" r="50000" b="50000"/>
-          </a:path>
-        </a:gradFill>
-      </a:bgFillStyleLst>
-    </a:fmtScheme>
-  </a:themeElements>
-</a:theme>
 </file>
--- a/slides.pptx
+++ b/slides.pptx
@@ -7573,7 +7573,7 @@
             </a:pPr>
             <a:r>
               <a:rPr lang="en"/>
-              <a:t>In particolare, viene utilizzata la variante batch di K-means, la quale permette di individuare i centroidi senza avere a disposizione tutti i descrittori contemporaneamente. Si è scelto di utilizzare una singola iterazione dei batch a causa dell’alta disponibilità di descrittori (&gt; 10,000,000) e si è verificato che, anche se il numero di iterazioni viene posto a tre, l'accuratezza del classificatore migliore non subisce miglioramenti significativi.</a:t>
+              <a:t>In particolare, viene utilizzata la variante mini-batch di K-means, la quale permette di individuare i centroidi senza avere a disposizione tutti i descrittori contemporaneamente. Si è scelto di utilizzare una singola iterazione dei batch a causa dell’alta disponibilità di descrittori (&gt; 10,000,000) e si è verificato che, anche se il numero di iterazioni viene posto a tre, l'accuratezza del classificatore migliore non subisce miglioramenti significativi.</a:t>
             </a:r>
             <a:endParaRPr/>
           </a:p>
@@ -8187,7 +8187,7 @@
             <a:tbl>
               <a:tblPr>
                 <a:noFill/>
-                <a:tableStyleId>{31B95FE4-F402-427B-959E-E751FB834CB4}</a:tableStyleId>
+                <a:tableStyleId>{CF156573-D062-4AEE-A590-9B9099672B0A}</a:tableStyleId>
               </a:tblPr>
               <a:tblGrid>
                 <a:gridCol w="946725"/>
@@ -9927,6 +9927,285 @@
 </file>
 
 <file path=ppt/theme/theme1.xml><?xml version="1.0" encoding="utf-8"?>
+<a:theme xmlns:a="http://schemas.openxmlformats.org/drawingml/2006/main" xmlns:r="http://schemas.openxmlformats.org/officeDocument/2006/relationships">
+  <a:themeElements>
+    <a:clrScheme name="Default">
+      <a:dk1>
+        <a:srgbClr val="000000"/>
+      </a:dk1>
+      <a:lt1>
+        <a:srgbClr val="FFFFFF"/>
+      </a:lt1>
+      <a:dk2>
+        <a:srgbClr val="158158"/>
+      </a:dk2>
+      <a:lt2>
+        <a:srgbClr val="F3F3F3"/>
+      </a:lt2>
+      <a:accent1>
+        <a:srgbClr val="058DC7"/>
+      </a:accent1>
+      <a:accent2>
+        <a:srgbClr val="50B432"/>
+      </a:accent2>
+      <a:accent3>
+        <a:srgbClr val="ED561B"/>
+      </a:accent3>
+      <a:accent4>
+        <a:srgbClr val="EDEF00"/>
+      </a:accent4>
+      <a:accent5>
+        <a:srgbClr val="24CBE5"/>
+      </a:accent5>
+      <a:accent6>
+        <a:srgbClr val="64E572"/>
+      </a:accent6>
+      <a:hlink>
+        <a:srgbClr val="2200CC"/>
+      </a:hlink>
+      <a:folHlink>
+        <a:srgbClr val="551A8B"/>
+      </a:folHlink>
+    </a:clrScheme>
+    <a:fontScheme name="Office">
+      <a:majorFont>
+        <a:latin typeface="Arial"/>
+        <a:ea typeface=""/>
+        <a:cs typeface=""/>
+        <a:font script="Jpan" typeface="ＭＳ Ｐゴシック"/>
+        <a:font script="Hang" typeface="맑은 고딕"/>
+        <a:font script="Hans" typeface="宋体"/>
+        <a:font script="Hant" typeface="新細明體"/>
+        <a:font script="Arab" typeface="Times New Roman"/>
+        <a:font script="Hebr" typeface="Times New Roman"/>
+        <a:font script="Thai" typeface="Angsana New"/>
+        <a:font script="Ethi" typeface="Nyala"/>
+        <a:font script="Beng" typeface="Vrinda"/>
+        <a:font script="Gujr" typeface="Shruti"/>
+        <a:font script="Khmr" typeface="MoolBoran"/>
+        <a:font script="Knda" typeface="Tunga"/>
+        <a:font script="Guru" typeface="Raavi"/>
+        <a:font script="Cans" typeface="Euphemia"/>
+        <a:font script="Cher" typeface="Plantagenet Cherokee"/>
+        <a:font script="Yiii" typeface="Microsoft Yi Baiti"/>
+        <a:font script="Tibt" typeface="Microsoft Himalaya"/>
+        <a:font script="Thaa" typeface="MV Boli"/>
+        <a:font script="Deva" typeface="Mangal"/>
+        <a:font script="Telu" typeface="Gautami"/>
+        <a:font script="Taml" typeface="Latha"/>
+        <a:font script="Syrc" typeface="Estrangelo Edessa"/>
+        <a:font script="Orya" typeface="Kalinga"/>
+        <a:font script="Mlym" typeface="Kartika"/>
+        <a:font script="Laoo" typeface="DokChampa"/>
+        <a:font script="Sinh" typeface="Iskoola Pota"/>
+        <a:font script="Mong" typeface="Mongolian Baiti"/>
+        <a:font script="Viet" typeface="Times New Roman"/>
+        <a:font script="Uigh" typeface="Microsoft Uighur"/>
+        <a:font script="Geor" typeface="Sylfaen"/>
+      </a:majorFont>
+      <a:minorFont>
+        <a:latin typeface="Arial"/>
+        <a:ea typeface=""/>
+        <a:cs typeface=""/>
+        <a:font script="Jpan" typeface="ＭＳ Ｐゴシック"/>
+        <a:font script="Hang" typeface="맑은 고딕"/>
+        <a:font script="Hans" typeface="宋体"/>
+        <a:font script="Hant" typeface="新細明體"/>
+        <a:font script="Arab" typeface="Arial"/>
+        <a:font script="Hebr" typeface="Arial"/>
+        <a:font script="Thai" typeface="Cordia New"/>
+        <a:font script="Ethi" typeface="Nyala"/>
+        <a:font script="Beng" typeface="Vrinda"/>
+        <a:font script="Gujr" typeface="Shruti"/>
+        <a:font script="Khmr" typeface="DaunPenh"/>
+        <a:font script="Knda" typeface="Tunga"/>
+        <a:font script="Guru" typeface="Raavi"/>
+        <a:font script="Cans" typeface="Euphemia"/>
+        <a:font script="Cher" typeface="Plantagenet Cherokee"/>
+        <a:font script="Yiii" typeface="Microsoft Yi Baiti"/>
+        <a:font script="Tibt" typeface="Microsoft Himalaya"/>
+        <a:font script="Thaa" typeface="MV Boli"/>
+        <a:font script="Deva" typeface="Mangal"/>
+        <a:font script="Telu" typeface="Gautami"/>
+        <a:font script="Taml" typeface="Latha"/>
+        <a:font script="Syrc" typeface="Estrangelo Edessa"/>
+        <a:font script="Orya" typeface="Kalinga"/>
+        <a:font script="Mlym" typeface="Kartika"/>
+        <a:font script="Laoo" typeface="DokChampa"/>
+        <a:font script="Sinh" typeface="Iskoola Pota"/>
+        <a:font script="Mong" typeface="Mongolian Baiti"/>
+        <a:font script="Viet" typeface="Arial"/>
+        <a:font script="Uigh" typeface="Microsoft Uighur"/>
+        <a:font script="Geor" typeface="Sylfaen"/>
+      </a:minorFont>
+    </a:fontScheme>
+    <a:fmtScheme name="Office">
+      <a:fillStyleLst>
+        <a:solidFill>
+          <a:schemeClr val="phClr"/>
+        </a:solidFill>
+        <a:gradFill rotWithShape="1">
+          <a:gsLst>
+            <a:gs pos="0">
+              <a:schemeClr val="phClr">
+                <a:tint val="50000"/>
+                <a:satMod val="300000"/>
+              </a:schemeClr>
+            </a:gs>
+            <a:gs pos="35000">
+              <a:schemeClr val="phClr">
+                <a:tint val="37000"/>
+                <a:satMod val="300000"/>
+              </a:schemeClr>
+            </a:gs>
+            <a:gs pos="100000">
+              <a:schemeClr val="phClr">
+                <a:tint val="15000"/>
+                <a:satMod val="350000"/>
+              </a:schemeClr>
+            </a:gs>
+          </a:gsLst>
+          <a:lin ang="16200000" scaled="1"/>
+        </a:gradFill>
+        <a:gradFill rotWithShape="1">
+          <a:gsLst>
+            <a:gs pos="0">
+              <a:schemeClr val="phClr">
+                <a:tint val="100000"/>
+                <a:shade val="100000"/>
+                <a:satMod val="130000"/>
+              </a:schemeClr>
+            </a:gs>
+            <a:gs pos="100000">
+              <a:schemeClr val="phClr">
+                <a:tint val="50000"/>
+                <a:shade val="100000"/>
+                <a:satMod val="350000"/>
+              </a:schemeClr>
+            </a:gs>
+          </a:gsLst>
+          <a:lin ang="16200000" scaled="0"/>
+        </a:gradFill>
+      </a:fillStyleLst>
+      <a:lnStyleLst>
+        <a:ln w="9525" cap="flat" cmpd="sng" algn="ctr">
+          <a:solidFill>
+            <a:schemeClr val="phClr">
+              <a:shade val="95000"/>
+              <a:satMod val="105000"/>
+            </a:schemeClr>
+          </a:solidFill>
+          <a:prstDash val="solid"/>
+        </a:ln>
+        <a:ln w="25400" cap="flat" cmpd="sng" algn="ctr">
+          <a:solidFill>
+            <a:schemeClr val="phClr"/>
+          </a:solidFill>
+          <a:prstDash val="solid"/>
+        </a:ln>
+        <a:ln w="38100" cap="flat" cmpd="sng" algn="ctr">
+          <a:solidFill>
+            <a:schemeClr val="phClr"/>
+          </a:solidFill>
+          <a:prstDash val="solid"/>
+        </a:ln>
+      </a:lnStyleLst>
+      <a:effectStyleLst>
+        <a:effectStyle>
+          <a:effectLst>
+            <a:outerShdw blurRad="40000" dist="20000" dir="5400000" rotWithShape="0">
+              <a:srgbClr val="000000">
+                <a:alpha val="38000"/>
+              </a:srgbClr>
+            </a:outerShdw>
+          </a:effectLst>
+        </a:effectStyle>
+        <a:effectStyle>
+          <a:effectLst>
+            <a:outerShdw blurRad="40000" dist="23000" dir="5400000" rotWithShape="0">
+              <a:srgbClr val="000000">
+                <a:alpha val="35000"/>
+              </a:srgbClr>
+            </a:outerShdw>
+          </a:effectLst>
+        </a:effectStyle>
+        <a:effectStyle>
+          <a:effectLst>
+            <a:outerShdw blurRad="40000" dist="23000" dir="5400000" rotWithShape="0">
+              <a:srgbClr val="000000">
+                <a:alpha val="35000"/>
+              </a:srgbClr>
+            </a:outerShdw>
+          </a:effectLst>
+          <a:scene3d>
+            <a:camera prst="orthographicFront">
+              <a:rot lat="0" lon="0" rev="0"/>
+            </a:camera>
+            <a:lightRig rig="threePt" dir="t">
+              <a:rot lat="0" lon="0" rev="1200000"/>
+            </a:lightRig>
+          </a:scene3d>
+          <a:sp3d>
+            <a:bevelT w="63500" h="25400"/>
+          </a:sp3d>
+        </a:effectStyle>
+      </a:effectStyleLst>
+      <a:bgFillStyleLst>
+        <a:solidFill>
+          <a:schemeClr val="phClr"/>
+        </a:solidFill>
+        <a:gradFill rotWithShape="1">
+          <a:gsLst>
+            <a:gs pos="0">
+              <a:schemeClr val="phClr">
+                <a:tint val="40000"/>
+                <a:satMod val="350000"/>
+              </a:schemeClr>
+            </a:gs>
+            <a:gs pos="40000">
+              <a:schemeClr val="phClr">
+                <a:tint val="45000"/>
+                <a:shade val="99000"/>
+                <a:satMod val="350000"/>
+              </a:schemeClr>
+            </a:gs>
+            <a:gs pos="100000">
+              <a:schemeClr val="phClr">
+                <a:shade val="20000"/>
+                <a:satMod val="255000"/>
+              </a:schemeClr>
+            </a:gs>
+          </a:gsLst>
+          <a:path path="circle">
+            <a:fillToRect l="50000" t="-80000" r="50000" b="180000"/>
+          </a:path>
+        </a:gradFill>
+        <a:gradFill rotWithShape="1">
+          <a:gsLst>
+            <a:gs pos="0">
+              <a:schemeClr val="phClr">
+                <a:tint val="80000"/>
+                <a:satMod val="300000"/>
+              </a:schemeClr>
+            </a:gs>
+            <a:gs pos="100000">
+              <a:schemeClr val="phClr">
+                <a:shade val="30000"/>
+                <a:satMod val="200000"/>
+              </a:schemeClr>
+            </a:gs>
+          </a:gsLst>
+          <a:path path="circle">
+            <a:fillToRect l="50000" t="50000" r="50000" b="50000"/>
+          </a:path>
+        </a:gradFill>
+      </a:bgFillStyleLst>
+    </a:fmtScheme>
+  </a:themeElements>
+</a:theme>
+</file>
+
+<file path=ppt/theme/theme2.xml><?xml version="1.0" encoding="utf-8"?>
 <a:theme xmlns:a="http://schemas.openxmlformats.org/drawingml/2006/main" xmlns:r="http://schemas.openxmlformats.org/officeDocument/2006/relationships" name="Simple Light">
   <a:themeElements>
     <a:clrScheme name="Simple Light">
@@ -10203,283 +10482,4 @@
     </a:fmtScheme>
   </a:themeElements>
 </a:theme>
-</file>
-
-<file path=ppt/theme/theme2.xml><?xml version="1.0" encoding="utf-8"?>
-<a:theme xmlns:a="http://schemas.openxmlformats.org/drawingml/2006/main" xmlns:r="http://schemas.openxmlformats.org/officeDocument/2006/relationships">
-  <a:themeElements>
-    <a:clrScheme name="Default">
-      <a:dk1>
-        <a:srgbClr val="000000"/>
-      </a:dk1>
-      <a:lt1>
-        <a:srgbClr val="FFFFFF"/>
-      </a:lt1>
-      <a:dk2>
-        <a:srgbClr val="158158"/>
-      </a:dk2>
-      <a:lt2>
-        <a:srgbClr val="F3F3F3"/>
-      </a:lt2>
-      <a:accent1>
-        <a:srgbClr val="058DC7"/>
-      </a:accent1>
-      <a:accent2>
-        <a:srgbClr val="50B432"/>
-      </a:accent2>
-      <a:accent3>
-        <a:srgbClr val="ED561B"/>
-      </a:accent3>
-      <a:accent4>
-        <a:srgbClr val="EDEF00"/>
-      </a:accent4>
-      <a:accent5>
-        <a:srgbClr val="24CBE5"/>
-      </a:accent5>
-      <a:accent6>
-        <a:srgbClr val="64E572"/>
-      </a:accent6>
-      <a:hlink>
-        <a:srgbClr val="2200CC"/>
-      </a:hlink>
-      <a:folHlink>
-        <a:srgbClr val="551A8B"/>
-      </a:folHlink>
-    </a:clrScheme>
-    <a:fontScheme name="Office">
-      <a:majorFont>
-        <a:latin typeface="Arial"/>
-        <a:ea typeface=""/>
-        <a:cs typeface=""/>
-        <a:font script="Jpan" typeface="ＭＳ Ｐゴシック"/>
-        <a:font script="Hang" typeface="맑은 고딕"/>
-        <a:font script="Hans" typeface="宋体"/>
-        <a:font script="Hant" typeface="新細明體"/>
-        <a:font script="Arab" typeface="Times New Roman"/>
-        <a:font script="Hebr" typeface="Times New Roman"/>
-        <a:font script="Thai" typeface="Angsana New"/>
-        <a:font script="Ethi" typeface="Nyala"/>
-        <a:font script="Beng" typeface="Vrinda"/>
-        <a:font script="Gujr" typeface="Shruti"/>
-        <a:font script="Khmr" typeface="MoolBoran"/>
-        <a:font script="Knda" typeface="Tunga"/>
-        <a:font script="Guru" typeface="Raavi"/>
-        <a:font script="Cans" typeface="Euphemia"/>
-        <a:font script="Cher" typeface="Plantagenet Cherokee"/>
-        <a:font script="Yiii" typeface="Microsoft Yi Baiti"/>
-        <a:font script="Tibt" typeface="Microsoft Himalaya"/>
-        <a:font script="Thaa" typeface="MV Boli"/>
-        <a:font script="Deva" typeface="Mangal"/>
-        <a:font script="Telu" typeface="Gautami"/>
-        <a:font script="Taml" typeface="Latha"/>
-        <a:font script="Syrc" typeface="Estrangelo Edessa"/>
-        <a:font script="Orya" typeface="Kalinga"/>
-        <a:font script="Mlym" typeface="Kartika"/>
-        <a:font script="Laoo" typeface="DokChampa"/>
-        <a:font script="Sinh" typeface="Iskoola Pota"/>
-        <a:font script="Mong" typeface="Mongolian Baiti"/>
-        <a:font script="Viet" typeface="Times New Roman"/>
-        <a:font script="Uigh" typeface="Microsoft Uighur"/>
-        <a:font script="Geor" typeface="Sylfaen"/>
-      </a:majorFont>
-      <a:minorFont>
-        <a:latin typeface="Arial"/>
-        <a:ea typeface=""/>
-        <a:cs typeface=""/>
-        <a:font script="Jpan" typeface="ＭＳ Ｐゴシック"/>
-        <a:font script="Hang" typeface="맑은 고딕"/>
-        <a:font script="Hans" typeface="宋体"/>
-        <a:font script="Hant" typeface="新細明體"/>
-        <a:font script="Arab" typeface="Arial"/>
-        <a:font script="Hebr" typeface="Arial"/>
-        <a:font script="Thai" typeface="Cordia New"/>
-        <a:font script="Ethi" typeface="Nyala"/>
-        <a:font script="Beng" typeface="Vrinda"/>
-        <a:font script="Gujr" typeface="Shruti"/>
-        <a:font script="Khmr" typeface="DaunPenh"/>
-        <a:font script="Knda" typeface="Tunga"/>
-        <a:font script="Guru" typeface="Raavi"/>
-        <a:font script="Cans" typeface="Euphemia"/>
-        <a:font script="Cher" typeface="Plantagenet Cherokee"/>
-        <a:font script="Yiii" typeface="Microsoft Yi Baiti"/>
-        <a:font script="Tibt" typeface="Microsoft Himalaya"/>
-        <a:font script="Thaa" typeface="MV Boli"/>
-        <a:font script="Deva" typeface="Mangal"/>
-        <a:font script="Telu" typeface="Gautami"/>
-        <a:font script="Taml" typeface="Latha"/>
-        <a:font script="Syrc" typeface="Estrangelo Edessa"/>
-        <a:font script="Orya" typeface="Kalinga"/>
-        <a:font script="Mlym" typeface="Kartika"/>
-        <a:font script="Laoo" typeface="DokChampa"/>
-        <a:font script="Sinh" typeface="Iskoola Pota"/>
-        <a:font script="Mong" typeface="Mongolian Baiti"/>
-        <a:font script="Viet" typeface="Arial"/>
-        <a:font script="Uigh" typeface="Microsoft Uighur"/>
-        <a:font script="Geor" typeface="Sylfaen"/>
-      </a:minorFont>
-    </a:fontScheme>
-    <a:fmtScheme name="Office">
-      <a:fillStyleLst>
-        <a:solidFill>
-          <a:schemeClr val="phClr"/>
-        </a:solidFill>
-        <a:gradFill rotWithShape="1">
-          <a:gsLst>
-            <a:gs pos="0">
-              <a:schemeClr val="phClr">
-                <a:tint val="50000"/>
-                <a:satMod val="300000"/>
-              </a:schemeClr>
-            </a:gs>
-            <a:gs pos="35000">
-              <a:schemeClr val="phClr">
-                <a:tint val="37000"/>
-                <a:satMod val="300000"/>
-              </a:schemeClr>
-            </a:gs>
-            <a:gs pos="100000">
-              <a:schemeClr val="phClr">
-                <a:tint val="15000"/>
-                <a:satMod val="350000"/>
-              </a:schemeClr>
-            </a:gs>
-          </a:gsLst>
-          <a:lin ang="16200000" scaled="1"/>
-        </a:gradFill>
-        <a:gradFill rotWithShape="1">
-          <a:gsLst>
-            <a:gs pos="0">
-              <a:schemeClr val="phClr">
-                <a:tint val="100000"/>
-                <a:shade val="100000"/>
-                <a:satMod val="130000"/>
-              </a:schemeClr>
-            </a:gs>
-            <a:gs pos="100000">
-              <a:schemeClr val="phClr">
-                <a:tint val="50000"/>
-                <a:shade val="100000"/>
-                <a:satMod val="350000"/>
-              </a:schemeClr>
-            </a:gs>
-          </a:gsLst>
-          <a:lin ang="16200000" scaled="0"/>
-        </a:gradFill>
-      </a:fillStyleLst>
-      <a:lnStyleLst>
-        <a:ln w="9525" cap="flat" cmpd="sng" algn="ctr">
-          <a:solidFill>
-            <a:schemeClr val="phClr">
-              <a:shade val="95000"/>
-              <a:satMod val="105000"/>
-            </a:schemeClr>
-          </a:solidFill>
-          <a:prstDash val="solid"/>
-        </a:ln>
-        <a:ln w="25400" cap="flat" cmpd="sng" algn="ctr">
-          <a:solidFill>
-            <a:schemeClr val="phClr"/>
-          </a:solidFill>
-          <a:prstDash val="solid"/>
-        </a:ln>
-        <a:ln w="38100" cap="flat" cmpd="sng" algn="ctr">
-          <a:solidFill>
-            <a:schemeClr val="phClr"/>
-          </a:solidFill>
-          <a:prstDash val="solid"/>
-        </a:ln>
-      </a:lnStyleLst>
-      <a:effectStyleLst>
-        <a:effectStyle>
-          <a:effectLst>
-            <a:outerShdw blurRad="40000" dist="20000" dir="5400000" rotWithShape="0">
-              <a:srgbClr val="000000">
-                <a:alpha val="38000"/>
-              </a:srgbClr>
-            </a:outerShdw>
-          </a:effectLst>
-        </a:effectStyle>
-        <a:effectStyle>
-          <a:effectLst>
-            <a:outerShdw blurRad="40000" dist="23000" dir="5400000" rotWithShape="0">
-              <a:srgbClr val="000000">
-                <a:alpha val="35000"/>
-              </a:srgbClr>
-            </a:outerShdw>
-          </a:effectLst>
-        </a:effectStyle>
-        <a:effectStyle>
-          <a:effectLst>
-            <a:outerShdw blurRad="40000" dist="23000" dir="5400000" rotWithShape="0">
-              <a:srgbClr val="000000">
-                <a:alpha val="35000"/>
-              </a:srgbClr>
-            </a:outerShdw>
-          </a:effectLst>
-          <a:scene3d>
-            <a:camera prst="orthographicFront">
-              <a:rot lat="0" lon="0" rev="0"/>
-            </a:camera>
-            <a:lightRig rig="threePt" dir="t">
-              <a:rot lat="0" lon="0" rev="1200000"/>
-            </a:lightRig>
-          </a:scene3d>
-          <a:sp3d>
-            <a:bevelT w="63500" h="25400"/>
-          </a:sp3d>
-        </a:effectStyle>
-      </a:effectStyleLst>
-      <a:bgFillStyleLst>
-        <a:solidFill>
-          <a:schemeClr val="phClr"/>
-        </a:solidFill>
-        <a:gradFill rotWithShape="1">
-          <a:gsLst>
-            <a:gs pos="0">
-              <a:schemeClr val="phClr">
-                <a:tint val="40000"/>
-                <a:satMod val="350000"/>
-              </a:schemeClr>
-            </a:gs>
-            <a:gs pos="40000">
-              <a:schemeClr val="phClr">
-                <a:tint val="45000"/>
-                <a:shade val="99000"/>
-                <a:satMod val="350000"/>
-              </a:schemeClr>
-            </a:gs>
-            <a:gs pos="100000">
-              <a:schemeClr val="phClr">
-                <a:shade val="20000"/>
-                <a:satMod val="255000"/>
-              </a:schemeClr>
-            </a:gs>
-          </a:gsLst>
-          <a:path path="circle">
-            <a:fillToRect l="50000" t="-80000" r="50000" b="180000"/>
-          </a:path>
-        </a:gradFill>
-        <a:gradFill rotWithShape="1">
-          <a:gsLst>
-            <a:gs pos="0">
-              <a:schemeClr val="phClr">
-                <a:tint val="80000"/>
-                <a:satMod val="300000"/>
-              </a:schemeClr>
-            </a:gs>
-            <a:gs pos="100000">
-              <a:schemeClr val="phClr">
-                <a:shade val="30000"/>
-                <a:satMod val="200000"/>
-              </a:schemeClr>
-            </a:gs>
-          </a:gsLst>
-          <a:path path="circle">
-            <a:fillToRect l="50000" t="50000" r="50000" b="50000"/>
-          </a:path>
-        </a:gradFill>
-      </a:bgFillStyleLst>
-    </a:fmtScheme>
-  </a:themeElements>
-</a:theme>
 </file>
--- a/slides.pptx
+++ b/slides.pptx
@@ -7679,7 +7679,7 @@
       </p:sp>
       <p:pic>
         <p:nvPicPr>
-          <p:cNvPr id="137" name="Google Shape;137;p24" title="Figure_5.png"/>
+          <p:cNvPr id="137" name="Google Shape;137;p24" title="asasasasa.png"/>
           <p:cNvPicPr preferRelativeResize="0"/>
           <p:nvPr/>
         </p:nvPicPr>
@@ -7687,13 +7687,13 @@
           <a:blip r:embed="rId3">
             <a:alphaModFix/>
           </a:blip>
-          <a:srcRect b="9753" l="41192" r="9493" t="1986"/>
+          <a:srcRect b="8760" l="41111" r="9601" t="1666"/>
           <a:stretch/>
         </p:blipFill>
         <p:spPr>
           <a:xfrm>
-            <a:off x="5310350" y="1343550"/>
-            <a:ext cx="3556800" cy="3011147"/>
+            <a:off x="5310350" y="1247650"/>
+            <a:ext cx="3556800" cy="3057600"/>
           </a:xfrm>
           <a:prstGeom prst="rect">
             <a:avLst/>
@@ -7711,7 +7711,7 @@
           <p:nvPr/>
         </p:nvGraphicFramePr>
         <p:xfrm>
-          <a:off x="311700" y="3665000"/>
+          <a:off x="311700" y="3585475"/>
           <a:ext cx="3000000" cy="3000000"/>
         </p:xfrm>
         <a:graphic>
@@ -7719,7 +7719,7 @@
             <a:tbl>
               <a:tblPr>
                 <a:noFill/>
-                <a:tableStyleId>{F8830794-B20A-47C7-BDA6-925F706633A7}</a:tableStyleId>
+                <a:tableStyleId>{CD3E96D9-E143-4625-B8E8-AB0AB3C41494}</a:tableStyleId>
               </a:tblPr>
               <a:tblGrid>
                 <a:gridCol w="1432900"/>
@@ -7854,7 +7854,7 @@
                       </a:pPr>
                       <a:r>
                         <a:rPr lang="en" sz="1100"/>
-                        <a:t>0.8750</a:t>
+                        <a:t>0.9051</a:t>
                       </a:r>
                       <a:endParaRPr sz="1100"/>
                     </a:p>
@@ -7877,7 +7877,7 @@
                       </a:pPr>
                       <a:r>
                         <a:rPr lang="en" sz="1100"/>
-                        <a:t>0.8770</a:t>
+                        <a:t>0.9098</a:t>
                       </a:r>
                       <a:endParaRPr sz="1100"/>
                     </a:p>
@@ -7900,7 +7900,7 @@
                       </a:pPr>
                       <a:r>
                         <a:rPr lang="en" sz="1100"/>
-                        <a:t>0.8760</a:t>
+                        <a:t>0.9050</a:t>
                       </a:r>
                       <a:endParaRPr sz="1100"/>
                     </a:p>
@@ -7923,7 +7923,7 @@
                       </a:pPr>
                       <a:r>
                         <a:rPr lang="en" sz="1100"/>
-                        <a:t>0.8752</a:t>
+                        <a:t>0.9074</a:t>
                       </a:r>
                       <a:endParaRPr sz="1100"/>
                     </a:p>
@@ -10424,7 +10424,7 @@
             <a:tbl>
               <a:tblPr>
                 <a:noFill/>
-                <a:tableStyleId>{F8830794-B20A-47C7-BDA6-925F706633A7}</a:tableStyleId>
+                <a:tableStyleId>{CD3E96D9-E143-4625-B8E8-AB0AB3C41494}</a:tableStyleId>
               </a:tblPr>
               <a:tblGrid>
                 <a:gridCol w="1670800"/>
@@ -10641,7 +10641,11 @@
                       </a:pPr>
                       <a:r>
                         <a:rPr lang="en" sz="1000"/>
-                        <a:t>0.8142</a:t>
+                        <a:t>0.8</a:t>
+                      </a:r>
+                      <a:r>
+                        <a:rPr lang="en" sz="1000"/>
+                        <a:t>142</a:t>
                       </a:r>
                       <a:endParaRPr sz="1000"/>
                     </a:p>
@@ -10664,7 +10668,11 @@
                       </a:pPr>
                       <a:r>
                         <a:rPr lang="en" sz="1000"/>
-                        <a:t>0.8868</a:t>
+                        <a:t>0.8</a:t>
+                      </a:r>
+                      <a:r>
+                        <a:rPr lang="en" sz="1000"/>
+                        <a:t>868</a:t>
                       </a:r>
                       <a:endParaRPr sz="1000"/>
                     </a:p>
@@ -10687,7 +10695,11 @@
                       </a:pPr>
                       <a:r>
                         <a:rPr lang="en" sz="1000"/>
-                        <a:t>0.9174</a:t>
+                        <a:t>0.91</a:t>
+                      </a:r>
+                      <a:r>
+                        <a:rPr lang="en" sz="1000"/>
+                        <a:t>74</a:t>
                       </a:r>
                       <a:endParaRPr sz="1000"/>
                     </a:p>
@@ -10714,7 +10726,11 @@
                       </a:pPr>
                       <a:r>
                         <a:rPr lang="en" sz="1000"/>
-                        <a:t>0.8832</a:t>
+                        <a:t>0.8</a:t>
+                      </a:r>
+                      <a:r>
+                        <a:rPr lang="en" sz="1000"/>
+                        <a:t>832</a:t>
                       </a:r>
                       <a:endParaRPr sz="1000"/>
                     </a:p>

--- a/slides.pptx
+++ b/slides.pptx
@@ -7671,7 +7671,7 @@
             </a:pPr>
             <a:r>
               <a:rPr lang="en"/>
-              <a:t>L’F1-Score mostra un miglioramento del 15% rispetto alla support vector machine utilizzata nell’Assignment 2.</a:t>
+              <a:t>L’F1-Score mostra un miglioramento del 18% rispetto alla support vector machine utilizzata nell’Assignment 2.</a:t>
             </a:r>
             <a:endParaRPr/>
           </a:p>
@@ -7719,7 +7719,7 @@
             <a:tbl>
               <a:tblPr>
                 <a:noFill/>
-                <a:tableStyleId>{CD3E96D9-E143-4625-B8E8-AB0AB3C41494}</a:tableStyleId>
+                <a:tableStyleId>{BA8DF622-62CD-4A15-923E-5C4DD602BB09}</a:tableStyleId>
               </a:tblPr>
               <a:tblGrid>
                 <a:gridCol w="1432900"/>
@@ -8039,7 +8039,7 @@
         </p:spPr>
         <p:txBody>
           <a:bodyPr anchorCtr="0" anchor="t" bIns="91425" lIns="91425" spcFirstLastPara="1" rIns="91425" wrap="square" tIns="91425">
-            <a:normAutofit fontScale="70000" lnSpcReduction="10000"/>
+            <a:normAutofit fontScale="62500" lnSpcReduction="20000"/>
           </a:bodyPr>
           <a:lstStyle/>
           <a:p>
@@ -8070,7 +8070,15 @@
             </a:r>
             <a:r>
               <a:rPr lang="en"/>
-              <a:t> è una delle più comuni. Ne è un esempio l’immagine in alto a sinistra, la cui classe reale è </a:t>
+              <a:t> è una delle più comuni. Ne è un esempio l’immagine </a:t>
+            </a:r>
+            <a:r>
+              <a:rPr lang="en"/>
+              <a:t>del test set </a:t>
+            </a:r>
+            <a:r>
+              <a:rPr lang="en"/>
+              <a:t>in alto a sinistra, la cui classe reale è </a:t>
             </a:r>
             <a:r>
               <a:rPr i="1" lang="en"/>
@@ -8106,11 +8114,43 @@
             </a:r>
             <a:r>
               <a:rPr i="1" lang="en"/>
+              <a:t>denseresidential</a:t>
+            </a:r>
+            <a:r>
+              <a:rPr lang="en"/>
+              <a:t> con una probabilità del 57%. Seguono le classi </a:t>
+            </a:r>
+            <a:r>
+              <a:rPr i="1" lang="en"/>
+              <a:t>mediumresidential</a:t>
+            </a:r>
+            <a:r>
+              <a:rPr lang="en"/>
+              <a:t> (12%), </a:t>
+            </a:r>
+            <a:r>
+              <a:rPr i="1" lang="en"/>
               <a:t>intersection</a:t>
             </a:r>
             <a:r>
               <a:rPr lang="en"/>
-              <a:t>.</a:t>
+              <a:t> (7%), </a:t>
+            </a:r>
+            <a:r>
+              <a:rPr i="1" lang="en"/>
+              <a:t>buildings</a:t>
+            </a:r>
+            <a:r>
+              <a:rPr lang="en"/>
+              <a:t> (6%) e </a:t>
+            </a:r>
+            <a:r>
+              <a:rPr i="1" lang="en"/>
+              <a:t>tenniscourt</a:t>
+            </a:r>
+            <a:r>
+              <a:rPr lang="en"/>
+              <a:t> (5%).</a:t>
             </a:r>
             <a:endParaRPr/>
           </a:p>
@@ -8120,7 +8160,7 @@
                 <a:spcPts val="1200"/>
               </a:spcBef>
               <a:spcAft>
-                <a:spcPts val="1200"/>
+                <a:spcPts val="0"/>
               </a:spcAft>
               <a:buNone/>
             </a:pPr>
@@ -8134,7 +8174,23 @@
             </a:r>
             <a:r>
               <a:rPr lang="en"/>
-              <a:t>con una probabilità pari al 96% nonostante siano presenti molti elementi di disturbo. Analogamente, l’immagine in basso a destra viene classificata correttamente come </a:t>
+              <a:t>con una probabilità pari all’80% nonostante siano presenti molti elementi di disturbo.</a:t>
+            </a:r>
+            <a:endParaRPr/>
+          </a:p>
+          <a:p>
+            <a:pPr indent="0" lvl="0" marL="0" rtl="0" algn="just">
+              <a:spcBef>
+                <a:spcPts val="1200"/>
+              </a:spcBef>
+              <a:spcAft>
+                <a:spcPts val="1200"/>
+              </a:spcAft>
+              <a:buNone/>
+            </a:pPr>
+            <a:r>
+              <a:rPr lang="en"/>
+              <a:t>Analogamente, l’immagine in basso a destra viene classificata correttamente come </a:t>
             </a:r>
             <a:r>
               <a:rPr i="1" lang="en"/>
@@ -8142,7 +8198,7 @@
             </a:r>
             <a:r>
               <a:rPr lang="en"/>
-              <a:t> con una probabilità pari al 99%, tuttavia quest’ultima faceva parte del training set.</a:t>
+              <a:t> con una probabilità pari al 99%, tuttavia quest’ultima faceva parte del training set. La presenza del campo da tennis fa sorgere dei dubbi sul sovradattamento.</a:t>
             </a:r>
             <a:endParaRPr/>
           </a:p>
@@ -8164,7 +8220,7 @@
         </p:blipFill>
         <p:spPr>
           <a:xfrm>
-            <a:off x="0" y="0"/>
+            <a:off x="7033175" y="0"/>
             <a:ext cx="2110825" cy="2110825"/>
           </a:xfrm>
           <a:prstGeom prst="rect">
@@ -8192,7 +8248,7 @@
         </p:blipFill>
         <p:spPr>
           <a:xfrm>
-            <a:off x="7033175" y="0"/>
+            <a:off x="7033175" y="3032675"/>
             <a:ext cx="2110825" cy="2110825"/>
           </a:xfrm>
           <a:prstGeom prst="rect">
@@ -8206,7 +8262,7 @@
       </p:pic>
       <p:pic>
         <p:nvPicPr>
-          <p:cNvPr id="147" name="Google Shape;147;p25"/>
+          <p:cNvPr id="147" name="Google Shape;147;p25" title="mediumresidential09.jpg"/>
           <p:cNvPicPr preferRelativeResize="0"/>
           <p:nvPr/>
         </p:nvPicPr>
@@ -8220,7 +8276,7 @@
         </p:blipFill>
         <p:spPr>
           <a:xfrm>
-            <a:off x="0" y="3032675"/>
+            <a:off x="0" y="0"/>
             <a:ext cx="2110825" cy="2110825"/>
           </a:xfrm>
           <a:prstGeom prst="rect">
@@ -8234,7 +8290,7 @@
       </p:pic>
       <p:pic>
         <p:nvPicPr>
-          <p:cNvPr id="148" name="Google Shape;148;p25"/>
+          <p:cNvPr id="148" name="Google Shape;148;p25" title="tenniscourt46.jpg"/>
           <p:cNvPicPr preferRelativeResize="0"/>
           <p:nvPr/>
         </p:nvPicPr>
@@ -8248,7 +8304,7 @@
         </p:blipFill>
         <p:spPr>
           <a:xfrm>
-            <a:off x="7033175" y="3032675"/>
+            <a:off x="0" y="3032675"/>
             <a:ext cx="2110825" cy="2110825"/>
           </a:xfrm>
           <a:prstGeom prst="rect">
@@ -8379,7 +8435,7 @@
             </a:pPr>
             <a:r>
               <a:rPr lang="en"/>
-              <a:t>La classificazione multi-classe forza il modello a scegliere un'unica etichetta, ignorando il fatto che un'immagine aerea contiene spesso più elementi. Questo crea ambiguità sia per il modello in fase di addestramento, sia nella valutazione dei casi d'errore. Ne è un esempio l’immagine riportata in basso a destra in una slide precedente. Una possibile soluzione consiste nell’utilizzo di un dataset in cui a ogni immagine sono associate più classi.</a:t>
+              <a:t>La classificazione multi-classe forza il modello a scegliere un'unica etichetta, ignorando il fatto che un'immagine aerea contiene spesso più elementi. Questo crea ambiguità sia per il modello in fase di addestramento, sia nella valutazione dei casi d'errore. Ne è un esempio l’immagine riportata in basso a destra nella slide precedente. Una possibile soluzione consiste nell’utilizzo di un dataset in cui a ogni immagine sono associate più classi.</a:t>
             </a:r>
             <a:endParaRPr/>
           </a:p>
@@ -10424,7 +10480,7 @@
             <a:tbl>
               <a:tblPr>
                 <a:noFill/>
-                <a:tableStyleId>{CD3E96D9-E143-4625-B8E8-AB0AB3C41494}</a:tableStyleId>
+                <a:tableStyleId>{BA8DF622-62CD-4A15-923E-5C4DD602BB09}</a:tableStyleId>
               </a:tblPr>
               <a:tblGrid>
                 <a:gridCol w="1670800"/>
